--- a/dist/초2/수학/수와계산/초2_수학_수와계산_06_곱셈의뜻.pptx
+++ b/dist/초2/수학/수와계산/초2_수학_수와계산_06_곱셈의뜻.pptx
@@ -119,39 +119,39 @@
   <p:extLst>
     <p:ext uri="{521415D9-36F7-43E2-AB2F-B90AF26B5E84}">
       <p14:sectionLst xmlns:p14="http://schemas.microsoft.com/office/powerpoint/2010/main">
-        <p14:section name="도입" id="{2d8d3c75-2f1f-acdb-0c50-ad456d993873}">
+        <p14:section name="도입" id="{00933bc0-c4e2-a0fe-f0ac-b29523eebc09}">
           <p14:sldIdLst>
             <p14:sldId id="256"/>
             <p14:sldId id="257"/>
           </p14:sldIdLst>
         </p14:section>
-        <p14:section name="개념" id="{f984a5e9-0b5a-260c-e638-9e3b6f222439}">
+        <p14:section name="개념" id="{c4a2f304-0b6f-7c41-1217-b17b35a8b480}">
           <p14:sldIdLst>
             <p14:sldId id="258"/>
             <p14:sldId id="259"/>
             <p14:sldId id="260"/>
           </p14:sldIdLst>
         </p14:section>
-        <p14:section name="연습" id="{acc90836-345b-f783-267f-3f69d9346511}">
+        <p14:section name="연습" id="{eb07a9b3-b338-968c-a887-c76bbcd66f0b}">
           <p14:sldIdLst>
             <p14:sldId id="261"/>
             <p14:sldId id="262"/>
             <p14:sldId id="263"/>
           </p14:sldIdLst>
         </p14:section>
-        <p14:section name="확인" id="{6b374bdb-6fdc-a4b4-66aa-fdecf5ad2523}">
+        <p14:section name="확인" id="{948fed26-25ee-6488-c47c-5bb0b9f39123}">
           <p14:sldIdLst>
             <p14:sldId id="264"/>
             <p14:sldId id="265"/>
             <p14:sldId id="266"/>
           </p14:sldIdLst>
         </p14:section>
-        <p14:section name="정리" id="{6b32c0a8-8b90-b947-cdd0-0e283bced855}">
+        <p14:section name="정리" id="{c4c4a3b6-1d51-5cdb-b1ec-533511140eeb}">
           <p14:sldIdLst>
             <p14:sldId id="267"/>
           </p14:sldIdLst>
         </p14:section>
-        <p14:section name="보충" id="{42d3feb4-04a3-7546-4ada-e381c006aff3}">
+        <p14:section name="보충" id="{4f75fda2-26cd-350a-013f-55093fd3571c}">
           <p14:sldIdLst>
             <p14:sldId id="268"/>
           </p14:sldIdLst>
@@ -10675,7 +10675,7 @@
         </p:nvSpPr>
         <p:spPr>
           <a:xfrm>
-            <a:off x="2320747" y="2104339"/>
+            <a:off x="2501341" y="2104339"/>
             <a:ext cx="302362" cy="302362"/>
           </a:xfrm>
           <a:prstGeom prst="ellipse">
@@ -10700,7 +10700,7 @@
         </p:nvSpPr>
         <p:spPr>
           <a:xfrm>
-            <a:off x="2808427" y="2104339"/>
+            <a:off x="2989021" y="2104339"/>
             <a:ext cx="302362" cy="302362"/>
           </a:xfrm>
           <a:prstGeom prst="ellipse">
@@ -10725,7 +10725,7 @@
         </p:nvSpPr>
         <p:spPr>
           <a:xfrm>
-            <a:off x="3296107" y="2104339"/>
+            <a:off x="3476701" y="2104339"/>
             <a:ext cx="302362" cy="302362"/>
           </a:xfrm>
           <a:prstGeom prst="ellipse">
@@ -10750,7 +10750,7 @@
         </p:nvSpPr>
         <p:spPr>
           <a:xfrm>
-            <a:off x="3783787" y="2104339"/>
+            <a:off x="3964381" y="2104339"/>
             <a:ext cx="302362" cy="302362"/>
           </a:xfrm>
           <a:prstGeom prst="ellipse">
@@ -10775,7 +10775,7 @@
         </p:nvSpPr>
         <p:spPr>
           <a:xfrm>
-            <a:off x="4271467" y="2104339"/>
+            <a:off x="4452061" y="2104339"/>
             <a:ext cx="302362" cy="302362"/>
           </a:xfrm>
           <a:prstGeom prst="ellipse">
@@ -10800,7 +10800,7 @@
         </p:nvSpPr>
         <p:spPr>
           <a:xfrm>
-            <a:off x="2320747" y="2592019"/>
+            <a:off x="2501341" y="2592019"/>
             <a:ext cx="302362" cy="302362"/>
           </a:xfrm>
           <a:prstGeom prst="ellipse">
@@ -10825,7 +10825,7 @@
         </p:nvSpPr>
         <p:spPr>
           <a:xfrm>
-            <a:off x="2808427" y="2592019"/>
+            <a:off x="2989021" y="2592019"/>
             <a:ext cx="302362" cy="302362"/>
           </a:xfrm>
           <a:prstGeom prst="ellipse">
@@ -10850,7 +10850,7 @@
         </p:nvSpPr>
         <p:spPr>
           <a:xfrm>
-            <a:off x="3296107" y="2592019"/>
+            <a:off x="3476701" y="2592019"/>
             <a:ext cx="302362" cy="302362"/>
           </a:xfrm>
           <a:prstGeom prst="ellipse">
@@ -10875,7 +10875,7 @@
         </p:nvSpPr>
         <p:spPr>
           <a:xfrm>
-            <a:off x="3783787" y="2592019"/>
+            <a:off x="3964381" y="2592019"/>
             <a:ext cx="302362" cy="302362"/>
           </a:xfrm>
           <a:prstGeom prst="ellipse">
@@ -10900,7 +10900,7 @@
         </p:nvSpPr>
         <p:spPr>
           <a:xfrm>
-            <a:off x="4271467" y="2592019"/>
+            <a:off x="4452061" y="2592019"/>
             <a:ext cx="302362" cy="302362"/>
           </a:xfrm>
           <a:prstGeom prst="ellipse">
@@ -10925,7 +10925,7 @@
         </p:nvSpPr>
         <p:spPr>
           <a:xfrm>
-            <a:off x="2320747" y="3079699"/>
+            <a:off x="2501341" y="3079699"/>
             <a:ext cx="302362" cy="302362"/>
           </a:xfrm>
           <a:prstGeom prst="ellipse">
@@ -10950,7 +10950,7 @@
         </p:nvSpPr>
         <p:spPr>
           <a:xfrm>
-            <a:off x="2808427" y="3079699"/>
+            <a:off x="2989021" y="3079699"/>
             <a:ext cx="302362" cy="302362"/>
           </a:xfrm>
           <a:prstGeom prst="ellipse">
@@ -10975,7 +10975,7 @@
         </p:nvSpPr>
         <p:spPr>
           <a:xfrm>
-            <a:off x="3296107" y="3079699"/>
+            <a:off x="3476701" y="3079699"/>
             <a:ext cx="302362" cy="302362"/>
           </a:xfrm>
           <a:prstGeom prst="ellipse">
@@ -11000,7 +11000,7 @@
         </p:nvSpPr>
         <p:spPr>
           <a:xfrm>
-            <a:off x="3783787" y="3079699"/>
+            <a:off x="3964381" y="3079699"/>
             <a:ext cx="302362" cy="302362"/>
           </a:xfrm>
           <a:prstGeom prst="ellipse">
@@ -11025,7 +11025,7 @@
         </p:nvSpPr>
         <p:spPr>
           <a:xfrm>
-            <a:off x="4271467" y="3079699"/>
+            <a:off x="4452061" y="3079699"/>
             <a:ext cx="302362" cy="302362"/>
           </a:xfrm>
           <a:prstGeom prst="ellipse">
@@ -11050,7 +11050,7 @@
         </p:nvSpPr>
         <p:spPr>
           <a:xfrm>
-            <a:off x="2255520" y="2048256"/>
+            <a:off x="2436114" y="2048256"/>
             <a:ext cx="2383536" cy="414528"/>
           </a:xfrm>
           <a:prstGeom prst="roundRect">
@@ -11079,7 +11079,7 @@
         </p:nvSpPr>
         <p:spPr>
           <a:xfrm>
-            <a:off x="2255520" y="2535936"/>
+            <a:off x="2436114" y="2535936"/>
             <a:ext cx="2383536" cy="414528"/>
           </a:xfrm>
           <a:prstGeom prst="roundRect">
@@ -11108,7 +11108,7 @@
         </p:nvSpPr>
         <p:spPr>
           <a:xfrm>
-            <a:off x="2255520" y="3023616"/>
+            <a:off x="2436114" y="3023616"/>
             <a:ext cx="2383536" cy="414528"/>
           </a:xfrm>
           <a:prstGeom prst="roundRect">
@@ -11137,7 +11137,7 @@
         </p:nvSpPr>
         <p:spPr>
           <a:xfrm>
-            <a:off x="2228088" y="2011680"/>
+            <a:off x="2408682" y="2011680"/>
             <a:ext cx="2438400" cy="1463040"/>
           </a:xfrm>
           <a:prstGeom prst="rect">
@@ -11213,7 +11213,7 @@
         </p:nvSpPr>
         <p:spPr>
           <a:xfrm>
-            <a:off x="8879738" y="2081174"/>
+            <a:off x="9060332" y="2081174"/>
             <a:ext cx="226771" cy="226771"/>
           </a:xfrm>
           <a:prstGeom prst="ellipse">
@@ -11238,7 +11238,7 @@
         </p:nvSpPr>
         <p:spPr>
           <a:xfrm>
-            <a:off x="9245498" y="2081174"/>
+            <a:off x="9426092" y="2081174"/>
             <a:ext cx="226771" cy="226771"/>
           </a:xfrm>
           <a:prstGeom prst="ellipse">
@@ -11263,7 +11263,7 @@
         </p:nvSpPr>
         <p:spPr>
           <a:xfrm>
-            <a:off x="8879738" y="2446934"/>
+            <a:off x="9060332" y="2446934"/>
             <a:ext cx="226771" cy="226771"/>
           </a:xfrm>
           <a:prstGeom prst="ellipse">
@@ -11288,7 +11288,7 @@
         </p:nvSpPr>
         <p:spPr>
           <a:xfrm>
-            <a:off x="9245498" y="2446934"/>
+            <a:off x="9426092" y="2446934"/>
             <a:ext cx="226771" cy="226771"/>
           </a:xfrm>
           <a:prstGeom prst="ellipse">
@@ -11313,7 +11313,7 @@
         </p:nvSpPr>
         <p:spPr>
           <a:xfrm>
-            <a:off x="8879738" y="2812694"/>
+            <a:off x="9060332" y="2812694"/>
             <a:ext cx="226771" cy="226771"/>
           </a:xfrm>
           <a:prstGeom prst="ellipse">
@@ -11338,7 +11338,7 @@
         </p:nvSpPr>
         <p:spPr>
           <a:xfrm>
-            <a:off x="9245498" y="2812694"/>
+            <a:off x="9426092" y="2812694"/>
             <a:ext cx="226771" cy="226771"/>
           </a:xfrm>
           <a:prstGeom prst="ellipse">
@@ -11363,7 +11363,7 @@
         </p:nvSpPr>
         <p:spPr>
           <a:xfrm>
-            <a:off x="8879738" y="3178454"/>
+            <a:off x="9060332" y="3178454"/>
             <a:ext cx="226771" cy="226771"/>
           </a:xfrm>
           <a:prstGeom prst="ellipse">
@@ -11388,7 +11388,7 @@
         </p:nvSpPr>
         <p:spPr>
           <a:xfrm>
-            <a:off x="9245498" y="3178454"/>
+            <a:off x="9426092" y="3178454"/>
             <a:ext cx="226771" cy="226771"/>
           </a:xfrm>
           <a:prstGeom prst="ellipse">
@@ -11413,7 +11413,7 @@
         </p:nvSpPr>
         <p:spPr>
           <a:xfrm>
-            <a:off x="8837676" y="2048256"/>
+            <a:off x="9018270" y="2048256"/>
             <a:ext cx="676656" cy="292608"/>
           </a:xfrm>
           <a:prstGeom prst="roundRect">
@@ -11442,7 +11442,7 @@
         </p:nvSpPr>
         <p:spPr>
           <a:xfrm>
-            <a:off x="8837676" y="2414016"/>
+            <a:off x="9018270" y="2414016"/>
             <a:ext cx="676656" cy="292608"/>
           </a:xfrm>
           <a:prstGeom prst="roundRect">
@@ -11471,7 +11471,7 @@
         </p:nvSpPr>
         <p:spPr>
           <a:xfrm>
-            <a:off x="8837676" y="2779776"/>
+            <a:off x="9018270" y="2779776"/>
             <a:ext cx="676656" cy="292608"/>
           </a:xfrm>
           <a:prstGeom prst="roundRect">
@@ -11500,7 +11500,7 @@
         </p:nvSpPr>
         <p:spPr>
           <a:xfrm>
-            <a:off x="8837676" y="3145536"/>
+            <a:off x="9018270" y="3145536"/>
             <a:ext cx="676656" cy="292608"/>
           </a:xfrm>
           <a:prstGeom prst="roundRect">
@@ -11529,7 +11529,7 @@
         </p:nvSpPr>
         <p:spPr>
           <a:xfrm>
-            <a:off x="8810244" y="2011680"/>
+            <a:off x="8990838" y="2011680"/>
             <a:ext cx="731520" cy="1463040"/>
           </a:xfrm>
           <a:prstGeom prst="rect">
@@ -11605,7 +11605,7 @@
         </p:nvSpPr>
         <p:spPr>
           <a:xfrm>
-            <a:off x="1520190" y="3833622"/>
+            <a:off x="1700784" y="3833622"/>
             <a:ext cx="425196" cy="425196"/>
           </a:xfrm>
           <a:prstGeom prst="ellipse">
@@ -11630,7 +11630,7 @@
         </p:nvSpPr>
         <p:spPr>
           <a:xfrm>
-            <a:off x="2205990" y="3833622"/>
+            <a:off x="2386584" y="3833622"/>
             <a:ext cx="425196" cy="425196"/>
           </a:xfrm>
           <a:prstGeom prst="ellipse">
@@ -11655,7 +11655,7 @@
         </p:nvSpPr>
         <p:spPr>
           <a:xfrm>
-            <a:off x="2891790" y="3833622"/>
+            <a:off x="3072384" y="3833622"/>
             <a:ext cx="425196" cy="425196"/>
           </a:xfrm>
           <a:prstGeom prst="ellipse">
@@ -11680,7 +11680,7 @@
         </p:nvSpPr>
         <p:spPr>
           <a:xfrm>
-            <a:off x="3577590" y="3833622"/>
+            <a:off x="3758184" y="3833622"/>
             <a:ext cx="425196" cy="425196"/>
           </a:xfrm>
           <a:prstGeom prst="ellipse">
@@ -11705,7 +11705,7 @@
         </p:nvSpPr>
         <p:spPr>
           <a:xfrm>
-            <a:off x="4263390" y="3833622"/>
+            <a:off x="4443984" y="3833622"/>
             <a:ext cx="425196" cy="425196"/>
           </a:xfrm>
           <a:prstGeom prst="ellipse">
@@ -11730,7 +11730,7 @@
         </p:nvSpPr>
         <p:spPr>
           <a:xfrm>
-            <a:off x="4949190" y="3833622"/>
+            <a:off x="5129784" y="3833622"/>
             <a:ext cx="425196" cy="425196"/>
           </a:xfrm>
           <a:prstGeom prst="ellipse">
@@ -11755,7 +11755,7 @@
         </p:nvSpPr>
         <p:spPr>
           <a:xfrm>
-            <a:off x="1520190" y="4519422"/>
+            <a:off x="1700784" y="4519422"/>
             <a:ext cx="425196" cy="425196"/>
           </a:xfrm>
           <a:prstGeom prst="ellipse">
@@ -11780,7 +11780,7 @@
         </p:nvSpPr>
         <p:spPr>
           <a:xfrm>
-            <a:off x="2205990" y="4519422"/>
+            <a:off x="2386584" y="4519422"/>
             <a:ext cx="425196" cy="425196"/>
           </a:xfrm>
           <a:prstGeom prst="ellipse">
@@ -11805,7 +11805,7 @@
         </p:nvSpPr>
         <p:spPr>
           <a:xfrm>
-            <a:off x="2891790" y="4519422"/>
+            <a:off x="3072384" y="4519422"/>
             <a:ext cx="425196" cy="425196"/>
           </a:xfrm>
           <a:prstGeom prst="ellipse">
@@ -11830,7 +11830,7 @@
         </p:nvSpPr>
         <p:spPr>
           <a:xfrm>
-            <a:off x="3577590" y="4519422"/>
+            <a:off x="3758184" y="4519422"/>
             <a:ext cx="425196" cy="425196"/>
           </a:xfrm>
           <a:prstGeom prst="ellipse">
@@ -11855,7 +11855,7 @@
         </p:nvSpPr>
         <p:spPr>
           <a:xfrm>
-            <a:off x="4263390" y="4519422"/>
+            <a:off x="4443984" y="4519422"/>
             <a:ext cx="425196" cy="425196"/>
           </a:xfrm>
           <a:prstGeom prst="ellipse">
@@ -11880,7 +11880,7 @@
         </p:nvSpPr>
         <p:spPr>
           <a:xfrm>
-            <a:off x="4949190" y="4519422"/>
+            <a:off x="5129784" y="4519422"/>
             <a:ext cx="425196" cy="425196"/>
           </a:xfrm>
           <a:prstGeom prst="ellipse">
@@ -11905,7 +11905,7 @@
         </p:nvSpPr>
         <p:spPr>
           <a:xfrm>
-            <a:off x="1417320" y="3739896"/>
+            <a:off x="1597914" y="3739896"/>
             <a:ext cx="4059936" cy="612648"/>
           </a:xfrm>
           <a:prstGeom prst="roundRect">
@@ -11934,7 +11934,7 @@
         </p:nvSpPr>
         <p:spPr>
           <a:xfrm>
-            <a:off x="1417320" y="4425696"/>
+            <a:off x="1597914" y="4425696"/>
             <a:ext cx="4059936" cy="612648"/>
           </a:xfrm>
           <a:prstGeom prst="roundRect">
@@ -11963,7 +11963,7 @@
         </p:nvSpPr>
         <p:spPr>
           <a:xfrm>
-            <a:off x="1389888" y="3703320"/>
+            <a:off x="1570482" y="3703320"/>
             <a:ext cx="4114800" cy="1371600"/>
           </a:xfrm>
           <a:prstGeom prst="rect">
@@ -12039,7 +12039,7 @@
         </p:nvSpPr>
         <p:spPr>
           <a:xfrm>
-            <a:off x="8537143" y="3750259"/>
+            <a:off x="8717737" y="3750259"/>
             <a:ext cx="302362" cy="302362"/>
           </a:xfrm>
           <a:prstGeom prst="ellipse">
@@ -12064,7 +12064,7 @@
         </p:nvSpPr>
         <p:spPr>
           <a:xfrm>
-            <a:off x="9024823" y="3750259"/>
+            <a:off x="9205417" y="3750259"/>
             <a:ext cx="302362" cy="302362"/>
           </a:xfrm>
           <a:prstGeom prst="ellipse">
@@ -12089,7 +12089,7 @@
         </p:nvSpPr>
         <p:spPr>
           <a:xfrm>
-            <a:off x="9512503" y="3750259"/>
+            <a:off x="9693097" y="3750259"/>
             <a:ext cx="302362" cy="302362"/>
           </a:xfrm>
           <a:prstGeom prst="ellipse">
@@ -12114,7 +12114,7 @@
         </p:nvSpPr>
         <p:spPr>
           <a:xfrm>
-            <a:off x="8537143" y="4237939"/>
+            <a:off x="8717737" y="4237939"/>
             <a:ext cx="302362" cy="302362"/>
           </a:xfrm>
           <a:prstGeom prst="ellipse">
@@ -12139,7 +12139,7 @@
         </p:nvSpPr>
         <p:spPr>
           <a:xfrm>
-            <a:off x="9024823" y="4237939"/>
+            <a:off x="9205417" y="4237939"/>
             <a:ext cx="302362" cy="302362"/>
           </a:xfrm>
           <a:prstGeom prst="ellipse">
@@ -12164,7 +12164,7 @@
         </p:nvSpPr>
         <p:spPr>
           <a:xfrm>
-            <a:off x="9512503" y="4237939"/>
+            <a:off x="9693097" y="4237939"/>
             <a:ext cx="302362" cy="302362"/>
           </a:xfrm>
           <a:prstGeom prst="ellipse">
@@ -12189,7 +12189,7 @@
         </p:nvSpPr>
         <p:spPr>
           <a:xfrm>
-            <a:off x="8537143" y="4725619"/>
+            <a:off x="8717737" y="4725619"/>
             <a:ext cx="302362" cy="302362"/>
           </a:xfrm>
           <a:prstGeom prst="ellipse">
@@ -12214,7 +12214,7 @@
         </p:nvSpPr>
         <p:spPr>
           <a:xfrm>
-            <a:off x="9024823" y="4725619"/>
+            <a:off x="9205417" y="4725619"/>
             <a:ext cx="302362" cy="302362"/>
           </a:xfrm>
           <a:prstGeom prst="ellipse">
@@ -12239,7 +12239,7 @@
         </p:nvSpPr>
         <p:spPr>
           <a:xfrm>
-            <a:off x="9512503" y="4725619"/>
+            <a:off x="9693097" y="4725619"/>
             <a:ext cx="302362" cy="302362"/>
           </a:xfrm>
           <a:prstGeom prst="ellipse">
@@ -12264,7 +12264,7 @@
         </p:nvSpPr>
         <p:spPr>
           <a:xfrm>
-            <a:off x="8471916" y="3694176"/>
+            <a:off x="8652510" y="3694176"/>
             <a:ext cx="1408176" cy="414528"/>
           </a:xfrm>
           <a:prstGeom prst="roundRect">
@@ -12293,7 +12293,7 @@
         </p:nvSpPr>
         <p:spPr>
           <a:xfrm>
-            <a:off x="8471916" y="4181856"/>
+            <a:off x="8652510" y="4181856"/>
             <a:ext cx="1408176" cy="414528"/>
           </a:xfrm>
           <a:prstGeom prst="roundRect">
@@ -12322,7 +12322,7 @@
         </p:nvSpPr>
         <p:spPr>
           <a:xfrm>
-            <a:off x="8471916" y="4669536"/>
+            <a:off x="8652510" y="4669536"/>
             <a:ext cx="1408176" cy="414528"/>
           </a:xfrm>
           <a:prstGeom prst="roundRect">
@@ -12351,7 +12351,7 @@
         </p:nvSpPr>
         <p:spPr>
           <a:xfrm>
-            <a:off x="8444484" y="3657600"/>
+            <a:off x="8625078" y="3657600"/>
             <a:ext cx="1463040" cy="1463040"/>
           </a:xfrm>
           <a:prstGeom prst="rect">
@@ -13073,7 +13073,7 @@
         </p:nvSpPr>
         <p:spPr>
           <a:xfrm>
-            <a:off x="2391156" y="2098548"/>
+            <a:off x="3031236" y="2098548"/>
             <a:ext cx="283464" cy="283464"/>
           </a:xfrm>
           <a:prstGeom prst="ellipse">
@@ -13098,7 +13098,7 @@
         </p:nvSpPr>
         <p:spPr>
           <a:xfrm>
-            <a:off x="2848356" y="2098548"/>
+            <a:off x="3488436" y="2098548"/>
             <a:ext cx="283464" cy="283464"/>
           </a:xfrm>
           <a:prstGeom prst="ellipse">
@@ -13123,7 +13123,7 @@
         </p:nvSpPr>
         <p:spPr>
           <a:xfrm>
-            <a:off x="3305556" y="2098548"/>
+            <a:off x="3945636" y="2098548"/>
             <a:ext cx="283464" cy="283464"/>
           </a:xfrm>
           <a:prstGeom prst="ellipse">
@@ -13148,7 +13148,7 @@
         </p:nvSpPr>
         <p:spPr>
           <a:xfrm>
-            <a:off x="3762756" y="2098548"/>
+            <a:off x="4402836" y="2098548"/>
             <a:ext cx="283464" cy="283464"/>
           </a:xfrm>
           <a:prstGeom prst="ellipse">
@@ -13173,7 +13173,7 @@
         </p:nvSpPr>
         <p:spPr>
           <a:xfrm>
-            <a:off x="4219956" y="2098548"/>
+            <a:off x="4860036" y="2098548"/>
             <a:ext cx="283464" cy="283464"/>
           </a:xfrm>
           <a:prstGeom prst="ellipse">
@@ -13198,7 +13198,7 @@
         </p:nvSpPr>
         <p:spPr>
           <a:xfrm>
-            <a:off x="2391156" y="2555748"/>
+            <a:off x="3031236" y="2555748"/>
             <a:ext cx="283464" cy="283464"/>
           </a:xfrm>
           <a:prstGeom prst="ellipse">
@@ -13223,7 +13223,7 @@
         </p:nvSpPr>
         <p:spPr>
           <a:xfrm>
-            <a:off x="2848356" y="2555748"/>
+            <a:off x="3488436" y="2555748"/>
             <a:ext cx="283464" cy="283464"/>
           </a:xfrm>
           <a:prstGeom prst="ellipse">
@@ -13248,7 +13248,7 @@
         </p:nvSpPr>
         <p:spPr>
           <a:xfrm>
-            <a:off x="3305556" y="2555748"/>
+            <a:off x="3945636" y="2555748"/>
             <a:ext cx="283464" cy="283464"/>
           </a:xfrm>
           <a:prstGeom prst="ellipse">
@@ -13273,7 +13273,7 @@
         </p:nvSpPr>
         <p:spPr>
           <a:xfrm>
-            <a:off x="3762756" y="2555748"/>
+            <a:off x="4402836" y="2555748"/>
             <a:ext cx="283464" cy="283464"/>
           </a:xfrm>
           <a:prstGeom prst="ellipse">
@@ -13298,7 +13298,7 @@
         </p:nvSpPr>
         <p:spPr>
           <a:xfrm>
-            <a:off x="4219956" y="2555748"/>
+            <a:off x="4860036" y="2555748"/>
             <a:ext cx="283464" cy="283464"/>
           </a:xfrm>
           <a:prstGeom prst="ellipse">
@@ -13323,7 +13323,7 @@
         </p:nvSpPr>
         <p:spPr>
           <a:xfrm>
-            <a:off x="2331720" y="2048256"/>
+            <a:off x="2971800" y="2048256"/>
             <a:ext cx="2231136" cy="384048"/>
           </a:xfrm>
           <a:prstGeom prst="roundRect">
@@ -13352,7 +13352,7 @@
         </p:nvSpPr>
         <p:spPr>
           <a:xfrm>
-            <a:off x="2331720" y="2505456"/>
+            <a:off x="2971800" y="2505456"/>
             <a:ext cx="2231136" cy="384048"/>
           </a:xfrm>
           <a:prstGeom prst="roundRect">
@@ -13381,7 +13381,7 @@
         </p:nvSpPr>
         <p:spPr>
           <a:xfrm>
-            <a:off x="2304288" y="2011680"/>
+            <a:off x="2944368" y="2011680"/>
             <a:ext cx="2286000" cy="914400"/>
           </a:xfrm>
           <a:prstGeom prst="rect">
@@ -13735,7 +13735,7 @@
         </p:nvSpPr>
         <p:spPr>
           <a:xfrm>
-            <a:off x="548640" y="2459736"/>
+            <a:off x="548640" y="2734056"/>
             <a:ext cx="566928" cy="566928"/>
           </a:xfrm>
           <a:prstGeom prst="roundRect">
@@ -13782,8 +13782,8 @@
         </p:nvSpPr>
         <p:spPr>
           <a:xfrm>
-            <a:off x="2602382" y="2081174"/>
-            <a:ext cx="226771" cy="226771"/>
+            <a:off x="2466137" y="2107235"/>
+            <a:ext cx="311810" cy="311810"/>
           </a:xfrm>
           <a:prstGeom prst="ellipse">
             <a:avLst/>
@@ -13807,8 +13807,8 @@
         </p:nvSpPr>
         <p:spPr>
           <a:xfrm>
-            <a:off x="2968142" y="2081174"/>
-            <a:ext cx="226771" cy="226771"/>
+            <a:off x="2969057" y="2107235"/>
+            <a:ext cx="311810" cy="311810"/>
           </a:xfrm>
           <a:prstGeom prst="ellipse">
             <a:avLst/>
@@ -13832,8 +13832,8 @@
         </p:nvSpPr>
         <p:spPr>
           <a:xfrm>
-            <a:off x="3333902" y="2081174"/>
-            <a:ext cx="226771" cy="226771"/>
+            <a:off x="3471977" y="2107235"/>
+            <a:ext cx="311810" cy="311810"/>
           </a:xfrm>
           <a:prstGeom prst="ellipse">
             <a:avLst/>
@@ -13857,8 +13857,8 @@
         </p:nvSpPr>
         <p:spPr>
           <a:xfrm>
-            <a:off x="3699662" y="2081174"/>
-            <a:ext cx="226771" cy="226771"/>
+            <a:off x="3974897" y="2107235"/>
+            <a:ext cx="311810" cy="311810"/>
           </a:xfrm>
           <a:prstGeom prst="ellipse">
             <a:avLst/>
@@ -13882,8 +13882,8 @@
         </p:nvSpPr>
         <p:spPr>
           <a:xfrm>
-            <a:off x="4065422" y="2081174"/>
-            <a:ext cx="226771" cy="226771"/>
+            <a:off x="4477817" y="2107235"/>
+            <a:ext cx="311810" cy="311810"/>
           </a:xfrm>
           <a:prstGeom prst="ellipse">
             <a:avLst/>
@@ -13907,8 +13907,8 @@
         </p:nvSpPr>
         <p:spPr>
           <a:xfrm>
-            <a:off x="2602382" y="2446934"/>
-            <a:ext cx="226771" cy="226771"/>
+            <a:off x="2466137" y="2610155"/>
+            <a:ext cx="311810" cy="311810"/>
           </a:xfrm>
           <a:prstGeom prst="ellipse">
             <a:avLst/>
@@ -13932,8 +13932,8 @@
         </p:nvSpPr>
         <p:spPr>
           <a:xfrm>
-            <a:off x="2968142" y="2446934"/>
-            <a:ext cx="226771" cy="226771"/>
+            <a:off x="2969057" y="2610155"/>
+            <a:ext cx="311810" cy="311810"/>
           </a:xfrm>
           <a:prstGeom prst="ellipse">
             <a:avLst/>
@@ -13957,8 +13957,8 @@
         </p:nvSpPr>
         <p:spPr>
           <a:xfrm>
-            <a:off x="3333902" y="2446934"/>
-            <a:ext cx="226771" cy="226771"/>
+            <a:off x="3471977" y="2610155"/>
+            <a:ext cx="311810" cy="311810"/>
           </a:xfrm>
           <a:prstGeom prst="ellipse">
             <a:avLst/>
@@ -13982,8 +13982,8 @@
         </p:nvSpPr>
         <p:spPr>
           <a:xfrm>
-            <a:off x="3699662" y="2446934"/>
-            <a:ext cx="226771" cy="226771"/>
+            <a:off x="3974897" y="2610155"/>
+            <a:ext cx="311810" cy="311810"/>
           </a:xfrm>
           <a:prstGeom prst="ellipse">
             <a:avLst/>
@@ -14007,8 +14007,8 @@
         </p:nvSpPr>
         <p:spPr>
           <a:xfrm>
-            <a:off x="4065422" y="2446934"/>
-            <a:ext cx="226771" cy="226771"/>
+            <a:off x="4477817" y="2610155"/>
+            <a:ext cx="311810" cy="311810"/>
           </a:xfrm>
           <a:prstGeom prst="ellipse">
             <a:avLst/>
@@ -14032,8 +14032,8 @@
         </p:nvSpPr>
         <p:spPr>
           <a:xfrm>
-            <a:off x="2602382" y="2812694"/>
-            <a:ext cx="226771" cy="226771"/>
+            <a:off x="2466137" y="3113075"/>
+            <a:ext cx="311810" cy="311810"/>
           </a:xfrm>
           <a:prstGeom prst="ellipse">
             <a:avLst/>
@@ -14057,8 +14057,8 @@
         </p:nvSpPr>
         <p:spPr>
           <a:xfrm>
-            <a:off x="2968142" y="2812694"/>
-            <a:ext cx="226771" cy="226771"/>
+            <a:off x="2969057" y="3113075"/>
+            <a:ext cx="311810" cy="311810"/>
           </a:xfrm>
           <a:prstGeom prst="ellipse">
             <a:avLst/>
@@ -14082,8 +14082,8 @@
         </p:nvSpPr>
         <p:spPr>
           <a:xfrm>
-            <a:off x="3333902" y="2812694"/>
-            <a:ext cx="226771" cy="226771"/>
+            <a:off x="3471977" y="3113075"/>
+            <a:ext cx="311810" cy="311810"/>
           </a:xfrm>
           <a:prstGeom prst="ellipse">
             <a:avLst/>
@@ -14107,8 +14107,8 @@
         </p:nvSpPr>
         <p:spPr>
           <a:xfrm>
-            <a:off x="3699662" y="2812694"/>
-            <a:ext cx="226771" cy="226771"/>
+            <a:off x="3974897" y="3113075"/>
+            <a:ext cx="311810" cy="311810"/>
           </a:xfrm>
           <a:prstGeom prst="ellipse">
             <a:avLst/>
@@ -14132,8 +14132,8 @@
         </p:nvSpPr>
         <p:spPr>
           <a:xfrm>
-            <a:off x="4065422" y="2812694"/>
-            <a:ext cx="226771" cy="226771"/>
+            <a:off x="4477817" y="3113075"/>
+            <a:ext cx="311810" cy="311810"/>
           </a:xfrm>
           <a:prstGeom prst="ellipse">
             <a:avLst/>
@@ -14157,8 +14157,8 @@
         </p:nvSpPr>
         <p:spPr>
           <a:xfrm>
-            <a:off x="2602382" y="3178454"/>
-            <a:ext cx="226771" cy="226771"/>
+            <a:off x="2466137" y="3615995"/>
+            <a:ext cx="311810" cy="311810"/>
           </a:xfrm>
           <a:prstGeom prst="ellipse">
             <a:avLst/>
@@ -14182,8 +14182,8 @@
         </p:nvSpPr>
         <p:spPr>
           <a:xfrm>
-            <a:off x="2968142" y="3178454"/>
-            <a:ext cx="226771" cy="226771"/>
+            <a:off x="2969057" y="3615995"/>
+            <a:ext cx="311810" cy="311810"/>
           </a:xfrm>
           <a:prstGeom prst="ellipse">
             <a:avLst/>
@@ -14207,8 +14207,8 @@
         </p:nvSpPr>
         <p:spPr>
           <a:xfrm>
-            <a:off x="3333902" y="3178454"/>
-            <a:ext cx="226771" cy="226771"/>
+            <a:off x="3471977" y="3615995"/>
+            <a:ext cx="311810" cy="311810"/>
           </a:xfrm>
           <a:prstGeom prst="ellipse">
             <a:avLst/>
@@ -14232,8 +14232,8 @@
         </p:nvSpPr>
         <p:spPr>
           <a:xfrm>
-            <a:off x="3699662" y="3178454"/>
-            <a:ext cx="226771" cy="226771"/>
+            <a:off x="3974897" y="3615995"/>
+            <a:ext cx="311810" cy="311810"/>
           </a:xfrm>
           <a:prstGeom prst="ellipse">
             <a:avLst/>
@@ -14257,8 +14257,8 @@
         </p:nvSpPr>
         <p:spPr>
           <a:xfrm>
-            <a:off x="4065422" y="3178454"/>
-            <a:ext cx="226771" cy="226771"/>
+            <a:off x="4477817" y="3615995"/>
+            <a:ext cx="311810" cy="311810"/>
           </a:xfrm>
           <a:prstGeom prst="ellipse">
             <a:avLst/>
@@ -14282,12 +14282,12 @@
         </p:nvSpPr>
         <p:spPr>
           <a:xfrm>
-            <a:off x="2560320" y="2048256"/>
-            <a:ext cx="1773936" cy="292608"/>
+            <a:off x="2398014" y="2048256"/>
+            <a:ext cx="2459736" cy="429768"/>
           </a:xfrm>
           <a:prstGeom prst="roundRect">
             <a:avLst>
-              <a:gd name="adj" fmla="val 37500"/>
+              <a:gd name="adj" fmla="val 25532"/>
             </a:avLst>
           </a:prstGeom>
           <a:solidFill>
@@ -14311,12 +14311,12 @@
         </p:nvSpPr>
         <p:spPr>
           <a:xfrm>
-            <a:off x="2560320" y="2414016"/>
-            <a:ext cx="1773936" cy="292608"/>
+            <a:off x="2398014" y="2551176"/>
+            <a:ext cx="2459736" cy="429768"/>
           </a:xfrm>
           <a:prstGeom prst="roundRect">
             <a:avLst>
-              <a:gd name="adj" fmla="val 37500"/>
+              <a:gd name="adj" fmla="val 25532"/>
             </a:avLst>
           </a:prstGeom>
           <a:solidFill>
@@ -14340,12 +14340,12 @@
         </p:nvSpPr>
         <p:spPr>
           <a:xfrm>
-            <a:off x="2560320" y="2779776"/>
-            <a:ext cx="1773936" cy="292608"/>
+            <a:off x="2398014" y="3054096"/>
+            <a:ext cx="2459736" cy="429768"/>
           </a:xfrm>
           <a:prstGeom prst="roundRect">
             <a:avLst>
-              <a:gd name="adj" fmla="val 37500"/>
+              <a:gd name="adj" fmla="val 25532"/>
             </a:avLst>
           </a:prstGeom>
           <a:solidFill>
@@ -14369,12 +14369,12 @@
         </p:nvSpPr>
         <p:spPr>
           <a:xfrm>
-            <a:off x="2560320" y="3145536"/>
-            <a:ext cx="1773936" cy="292608"/>
+            <a:off x="2398014" y="3557016"/>
+            <a:ext cx="2459736" cy="429768"/>
           </a:xfrm>
           <a:prstGeom prst="roundRect">
             <a:avLst>
-              <a:gd name="adj" fmla="val 37500"/>
+              <a:gd name="adj" fmla="val 25532"/>
             </a:avLst>
           </a:prstGeom>
           <a:solidFill>
@@ -14398,8 +14398,8 @@
         </p:nvSpPr>
         <p:spPr>
           <a:xfrm>
-            <a:off x="2532888" y="2011680"/>
-            <a:ext cx="1828800" cy="1463040"/>
+            <a:off x="2370582" y="2011680"/>
+            <a:ext cx="2514600" cy="2011680"/>
           </a:xfrm>
           <a:prstGeom prst="rect">
             <a:avLst/>
